--- a/Document/항만_자동화_중간발표_수정본.pptx
+++ b/Document/항만_자동화_중간발표_수정본.pptx
@@ -3207,6 +3207,13 @@
             <a:noFill/>
           </a:ln>
         </p:spPr>
+        <p:txBody>
+          <a:bodyPr/>
+          <a:lstStyle/>
+          <a:p>
+            <a:endParaRPr lang="ko-KR" altLang="en-US"/>
+          </a:p>
+        </p:txBody>
       </p:sp>
       <p:sp>
         <p:nvSpPr>
@@ -3435,6 +3442,13 @@
             <a:noFill/>
           </a:ln>
         </p:spPr>
+        <p:txBody>
+          <a:bodyPr/>
+          <a:lstStyle/>
+          <a:p>
+            <a:endParaRPr lang="ko-KR" altLang="en-US"/>
+          </a:p>
+        </p:txBody>
       </p:sp>
       <p:sp>
         <p:nvSpPr>
@@ -4131,6 +4145,13 @@
             <a:noFill/>
           </a:ln>
         </p:spPr>
+        <p:txBody>
+          <a:bodyPr/>
+          <a:lstStyle/>
+          <a:p>
+            <a:endParaRPr lang="ko-KR" altLang="en-US"/>
+          </a:p>
+        </p:txBody>
       </p:sp>
       <p:sp>
         <p:nvSpPr>
@@ -4359,6 +4380,13 @@
             <a:noFill/>
           </a:ln>
         </p:spPr>
+        <p:txBody>
+          <a:bodyPr/>
+          <a:lstStyle/>
+          <a:p>
+            <a:endParaRPr lang="ko-KR" altLang="en-US"/>
+          </a:p>
+        </p:txBody>
       </p:sp>
       <p:sp>
         <p:nvSpPr>
@@ -5090,6 +5118,13 @@
             </a:solidFill>
           </a:ln>
         </p:spPr>
+        <p:txBody>
+          <a:bodyPr/>
+          <a:lstStyle/>
+          <a:p>
+            <a:endParaRPr lang="ko-KR" altLang="en-US"/>
+          </a:p>
+        </p:txBody>
       </p:sp>
       <p:sp>
         <p:nvSpPr>
@@ -5313,6 +5348,13 @@
             <a:noFill/>
           </a:ln>
         </p:spPr>
+        <p:txBody>
+          <a:bodyPr/>
+          <a:lstStyle/>
+          <a:p>
+            <a:endParaRPr lang="ko-KR" altLang="en-US"/>
+          </a:p>
+        </p:txBody>
       </p:sp>
       <p:sp>
         <p:nvSpPr>
@@ -5541,6 +5583,13 @@
             <a:noFill/>
           </a:ln>
         </p:spPr>
+        <p:txBody>
+          <a:bodyPr/>
+          <a:lstStyle/>
+          <a:p>
+            <a:endParaRPr lang="ko-KR" altLang="en-US"/>
+          </a:p>
+        </p:txBody>
       </p:sp>
       <p:sp>
         <p:nvSpPr>
@@ -6566,6 +6615,13 @@
             <a:noFill/>
           </a:ln>
         </p:spPr>
+        <p:txBody>
+          <a:bodyPr/>
+          <a:lstStyle/>
+          <a:p>
+            <a:endParaRPr lang="ko-KR" altLang="en-US"/>
+          </a:p>
+        </p:txBody>
       </p:sp>
       <p:sp>
         <p:nvSpPr>
@@ -6794,6 +6850,13 @@
             <a:noFill/>
           </a:ln>
         </p:spPr>
+        <p:txBody>
+          <a:bodyPr/>
+          <a:lstStyle/>
+          <a:p>
+            <a:endParaRPr lang="ko-KR" altLang="en-US"/>
+          </a:p>
+        </p:txBody>
       </p:sp>
       <p:sp>
         <p:nvSpPr>
@@ -7052,7 +7115,7 @@
       <p:pic>
         <p:nvPicPr>
           <p:cNvPr id="11" name="현재 시연 영상">
-            <a:hlinkClick action="ppaction://media"/>
+            <a:hlinkClick r:id="" action="ppaction://media"/>
             <a:extLst>
               <a:ext uri="{FF2B5EF4-FFF2-40B4-BE49-F238E27FC236}">
                 <a16:creationId xmlns:a16="http://schemas.microsoft.com/office/drawing/2014/main" id="{1EA84ECD-BAE4-D819-CE69-469726C6ADD9}"/>
@@ -7154,6 +7217,13 @@
             <a:noFill/>
           </a:ln>
         </p:spPr>
+        <p:txBody>
+          <a:bodyPr/>
+          <a:lstStyle/>
+          <a:p>
+            <a:endParaRPr lang="ko-KR" altLang="en-US"/>
+          </a:p>
+        </p:txBody>
       </p:sp>
       <p:sp>
         <p:nvSpPr>
@@ -7382,6 +7452,13 @@
             <a:noFill/>
           </a:ln>
         </p:spPr>
+        <p:txBody>
+          <a:bodyPr/>
+          <a:lstStyle/>
+          <a:p>
+            <a:endParaRPr lang="ko-KR" altLang="en-US"/>
+          </a:p>
+        </p:txBody>
       </p:sp>
       <p:sp>
         <p:nvSpPr>
@@ -7835,7 +7912,7 @@
               </a:defRPr>
             </a:pPr>
             <a:r>
-              <a:rPr sz="1725" b="0">
+              <a:rPr sz="1725" b="0" dirty="0" err="1">
                 <a:solidFill>
                   <a:srgbClr val="314B5D"/>
                 </a:solidFill>
@@ -7843,7 +7920,106 @@
                 <a:ea typeface="Malgun Gothic"/>
                 <a:cs typeface="Malgun Gothic"/>
               </a:rPr>
-              <a:t>인양 중 화물의 흔들림과 위치 이탈,</a:t>
+              <a:t>인양</a:t>
+            </a:r>
+            <a:r>
+              <a:rPr sz="1725" b="0" dirty="0">
+                <a:solidFill>
+                  <a:srgbClr val="314B5D"/>
+                </a:solidFill>
+                <a:latin typeface="Malgun Gothic"/>
+                <a:ea typeface="Malgun Gothic"/>
+                <a:cs typeface="Malgun Gothic"/>
+              </a:rPr>
+              <a:t> 중 </a:t>
+            </a:r>
+            <a:r>
+              <a:rPr sz="1725" b="0" dirty="0" err="1">
+                <a:solidFill>
+                  <a:srgbClr val="314B5D"/>
+                </a:solidFill>
+                <a:latin typeface="Malgun Gothic"/>
+                <a:ea typeface="Malgun Gothic"/>
+                <a:cs typeface="Malgun Gothic"/>
+              </a:rPr>
+              <a:t>화물의</a:t>
+            </a:r>
+            <a:r>
+              <a:rPr sz="1725" b="0" dirty="0">
+                <a:solidFill>
+                  <a:srgbClr val="314B5D"/>
+                </a:solidFill>
+                <a:latin typeface="Malgun Gothic"/>
+                <a:ea typeface="Malgun Gothic"/>
+                <a:cs typeface="Malgun Gothic"/>
+              </a:rPr>
+              <a:t> </a:t>
+            </a:r>
+            <a:r>
+              <a:rPr sz="1725" b="0" dirty="0" err="1">
+                <a:solidFill>
+                  <a:srgbClr val="314B5D"/>
+                </a:solidFill>
+                <a:latin typeface="Malgun Gothic"/>
+                <a:ea typeface="Malgun Gothic"/>
+                <a:cs typeface="Malgun Gothic"/>
+              </a:rPr>
+              <a:t>흔들림과</a:t>
+            </a:r>
+            <a:r>
+              <a:rPr sz="1725" b="0" dirty="0">
+                <a:solidFill>
+                  <a:srgbClr val="314B5D"/>
+                </a:solidFill>
+                <a:latin typeface="Malgun Gothic"/>
+                <a:ea typeface="Malgun Gothic"/>
+                <a:cs typeface="Malgun Gothic"/>
+              </a:rPr>
+              <a:t> </a:t>
+            </a:r>
+            <a:r>
+              <a:rPr sz="1725" b="0" dirty="0" err="1">
+                <a:solidFill>
+                  <a:srgbClr val="314B5D"/>
+                </a:solidFill>
+                <a:latin typeface="Malgun Gothic"/>
+                <a:ea typeface="Malgun Gothic"/>
+                <a:cs typeface="Malgun Gothic"/>
+              </a:rPr>
+              <a:t>위치</a:t>
+            </a:r>
+            <a:r>
+              <a:rPr sz="1725" b="0" dirty="0">
+                <a:solidFill>
+                  <a:srgbClr val="314B5D"/>
+                </a:solidFill>
+                <a:latin typeface="Malgun Gothic"/>
+                <a:ea typeface="Malgun Gothic"/>
+                <a:cs typeface="Malgun Gothic"/>
+              </a:rPr>
+              <a:t> </a:t>
+            </a:r>
+            <a:r>
+              <a:rPr sz="1725" b="0" dirty="0" err="1">
+                <a:solidFill>
+                  <a:srgbClr val="314B5D"/>
+                </a:solidFill>
+                <a:latin typeface="Malgun Gothic"/>
+                <a:ea typeface="Malgun Gothic"/>
+                <a:cs typeface="Malgun Gothic"/>
+              </a:rPr>
+              <a:t>이탈</a:t>
+            </a:r>
+            <a:r>
+              <a:rPr sz="1725" b="0" dirty="0">
+                <a:solidFill>
+                  <a:srgbClr val="314B5D"/>
+                </a:solidFill>
+                <a:latin typeface="Malgun Gothic"/>
+                <a:ea typeface="Malgun Gothic"/>
+                <a:cs typeface="Malgun Gothic"/>
+              </a:rPr>
+              <a:t>,</a:t>
             </a:r>
           </a:p>
           <a:p>
@@ -7858,7 +8034,7 @@
               </a:defRPr>
             </a:pPr>
             <a:r>
-              <a:rPr sz="1725" b="0">
+              <a:rPr sz="1725" b="0" dirty="0" err="1">
                 <a:solidFill>
                   <a:srgbClr val="314B5D"/>
                 </a:solidFill>
@@ -7866,8 +8042,82 @@
                 <a:ea typeface="Malgun Gothic"/>
                 <a:cs typeface="Malgun Gothic"/>
               </a:rPr>
-              <a:t>크레인 정렬·체결의 불안정, 인계 지연 등을</a:t>
-            </a:r>
+              <a:t>크레인</a:t>
+            </a:r>
+            <a:r>
+              <a:rPr sz="1725" b="0" dirty="0">
+                <a:solidFill>
+                  <a:srgbClr val="314B5D"/>
+                </a:solidFill>
+                <a:latin typeface="Malgun Gothic"/>
+                <a:ea typeface="Malgun Gothic"/>
+                <a:cs typeface="Malgun Gothic"/>
+              </a:rPr>
+              <a:t> </a:t>
+            </a:r>
+            <a:r>
+              <a:rPr sz="1725" b="0" dirty="0" err="1">
+                <a:solidFill>
+                  <a:srgbClr val="314B5D"/>
+                </a:solidFill>
+                <a:latin typeface="Malgun Gothic"/>
+                <a:ea typeface="Malgun Gothic"/>
+                <a:cs typeface="Malgun Gothic"/>
+              </a:rPr>
+              <a:t>정렬·체결의</a:t>
+            </a:r>
+            <a:r>
+              <a:rPr sz="1725" b="0" dirty="0">
+                <a:solidFill>
+                  <a:srgbClr val="314B5D"/>
+                </a:solidFill>
+                <a:latin typeface="Malgun Gothic"/>
+                <a:ea typeface="Malgun Gothic"/>
+                <a:cs typeface="Malgun Gothic"/>
+              </a:rPr>
+              <a:t> </a:t>
+            </a:r>
+            <a:r>
+              <a:rPr sz="1725" b="0" dirty="0" err="1">
+                <a:solidFill>
+                  <a:srgbClr val="314B5D"/>
+                </a:solidFill>
+                <a:latin typeface="Malgun Gothic"/>
+                <a:ea typeface="Malgun Gothic"/>
+                <a:cs typeface="Malgun Gothic"/>
+              </a:rPr>
+              <a:t>불안정</a:t>
+            </a:r>
+            <a:r>
+              <a:rPr sz="1725" b="0" dirty="0">
+                <a:solidFill>
+                  <a:srgbClr val="314B5D"/>
+                </a:solidFill>
+                <a:latin typeface="Malgun Gothic"/>
+                <a:ea typeface="Malgun Gothic"/>
+                <a:cs typeface="Malgun Gothic"/>
+              </a:rPr>
+              <a:t>, </a:t>
+            </a:r>
+            <a:r>
+              <a:rPr sz="1725" b="0" dirty="0" err="1">
+                <a:solidFill>
+                  <a:srgbClr val="314B5D"/>
+                </a:solidFill>
+                <a:latin typeface="Malgun Gothic"/>
+                <a:ea typeface="Malgun Gothic"/>
+                <a:cs typeface="Malgun Gothic"/>
+              </a:rPr>
+              <a:t>등을</a:t>
+            </a:r>
+            <a:endParaRPr sz="1725" b="0" dirty="0">
+              <a:solidFill>
+                <a:srgbClr val="314B5D"/>
+              </a:solidFill>
+              <a:latin typeface="Malgun Gothic"/>
+              <a:ea typeface="Malgun Gothic"/>
+              <a:cs typeface="Malgun Gothic"/>
+            </a:endParaRPr>
           </a:p>
           <a:p>
             <a:pPr>
@@ -7881,7 +8131,7 @@
               </a:defRPr>
             </a:pPr>
             <a:r>
-              <a:rPr sz="1725" b="0">
+              <a:rPr sz="1725" b="0" dirty="0" err="1">
                 <a:solidFill>
                   <a:srgbClr val="314B5D"/>
                 </a:solidFill>
@@ -7889,8 +8139,104 @@
                 <a:ea typeface="Malgun Gothic"/>
                 <a:cs typeface="Malgun Gothic"/>
               </a:rPr>
-              <a:t>검증 대상으로 설정합니다. 이러한 문제의</a:t>
-            </a:r>
+              <a:t>검증</a:t>
+            </a:r>
+            <a:r>
+              <a:rPr sz="1725" b="0" dirty="0">
+                <a:solidFill>
+                  <a:srgbClr val="314B5D"/>
+                </a:solidFill>
+                <a:latin typeface="Malgun Gothic"/>
+                <a:ea typeface="Malgun Gothic"/>
+                <a:cs typeface="Malgun Gothic"/>
+              </a:rPr>
+              <a:t> </a:t>
+            </a:r>
+            <a:r>
+              <a:rPr sz="1725" b="0" dirty="0" err="1">
+                <a:solidFill>
+                  <a:srgbClr val="314B5D"/>
+                </a:solidFill>
+                <a:latin typeface="Malgun Gothic"/>
+                <a:ea typeface="Malgun Gothic"/>
+                <a:cs typeface="Malgun Gothic"/>
+              </a:rPr>
+              <a:t>대상으로</a:t>
+            </a:r>
+            <a:r>
+              <a:rPr sz="1725" b="0" dirty="0">
+                <a:solidFill>
+                  <a:srgbClr val="314B5D"/>
+                </a:solidFill>
+                <a:latin typeface="Malgun Gothic"/>
+                <a:ea typeface="Malgun Gothic"/>
+                <a:cs typeface="Malgun Gothic"/>
+              </a:rPr>
+              <a:t> </a:t>
+            </a:r>
+            <a:r>
+              <a:rPr sz="1725" b="0" dirty="0" err="1">
+                <a:solidFill>
+                  <a:srgbClr val="314B5D"/>
+                </a:solidFill>
+                <a:latin typeface="Malgun Gothic"/>
+                <a:ea typeface="Malgun Gothic"/>
+                <a:cs typeface="Malgun Gothic"/>
+              </a:rPr>
+              <a:t>설정합니다</a:t>
+            </a:r>
+            <a:r>
+              <a:rPr sz="1725" b="0" dirty="0">
+                <a:solidFill>
+                  <a:srgbClr val="314B5D"/>
+                </a:solidFill>
+                <a:latin typeface="Malgun Gothic"/>
+                <a:ea typeface="Malgun Gothic"/>
+                <a:cs typeface="Malgun Gothic"/>
+              </a:rPr>
+              <a:t>. </a:t>
+            </a:r>
+            <a:r>
+              <a:rPr sz="1725" b="0" dirty="0" err="1">
+                <a:solidFill>
+                  <a:srgbClr val="314B5D"/>
+                </a:solidFill>
+                <a:latin typeface="Malgun Gothic"/>
+                <a:ea typeface="Malgun Gothic"/>
+                <a:cs typeface="Malgun Gothic"/>
+              </a:rPr>
+              <a:t>이러한</a:t>
+            </a:r>
+            <a:r>
+              <a:rPr sz="1725" b="0" dirty="0">
+                <a:solidFill>
+                  <a:srgbClr val="314B5D"/>
+                </a:solidFill>
+                <a:latin typeface="Malgun Gothic"/>
+                <a:ea typeface="Malgun Gothic"/>
+                <a:cs typeface="Malgun Gothic"/>
+              </a:rPr>
+              <a:t> </a:t>
+            </a:r>
+            <a:r>
+              <a:rPr sz="1725" b="0" dirty="0" err="1">
+                <a:solidFill>
+                  <a:srgbClr val="314B5D"/>
+                </a:solidFill>
+                <a:latin typeface="Malgun Gothic"/>
+                <a:ea typeface="Malgun Gothic"/>
+                <a:cs typeface="Malgun Gothic"/>
+              </a:rPr>
+              <a:t>문제의</a:t>
+            </a:r>
+            <a:endParaRPr sz="1725" b="0" dirty="0">
+              <a:solidFill>
+                <a:srgbClr val="314B5D"/>
+              </a:solidFill>
+              <a:latin typeface="Malgun Gothic"/>
+              <a:ea typeface="Malgun Gothic"/>
+              <a:cs typeface="Malgun Gothic"/>
+            </a:endParaRPr>
           </a:p>
           <a:p>
             <a:pPr>
@@ -7904,7 +8250,7 @@
               </a:defRPr>
             </a:pPr>
             <a:r>
-              <a:rPr sz="1725" b="0">
+              <a:rPr sz="1725" b="0" dirty="0" err="1">
                 <a:solidFill>
                   <a:srgbClr val="314B5D"/>
                 </a:solidFill>
@@ -7912,7 +8258,128 @@
                 <a:ea typeface="Malgun Gothic"/>
                 <a:cs typeface="Malgun Gothic"/>
               </a:rPr>
-              <a:t>실제 발생 여부와 영향 범위를 구분합니다.</a:t>
+              <a:t>실제</a:t>
+            </a:r>
+            <a:r>
+              <a:rPr sz="1725" b="0" dirty="0">
+                <a:solidFill>
+                  <a:srgbClr val="314B5D"/>
+                </a:solidFill>
+                <a:latin typeface="Malgun Gothic"/>
+                <a:ea typeface="Malgun Gothic"/>
+                <a:cs typeface="Malgun Gothic"/>
+              </a:rPr>
+              <a:t> </a:t>
+            </a:r>
+            <a:r>
+              <a:rPr sz="1725" b="0" dirty="0" err="1">
+                <a:solidFill>
+                  <a:srgbClr val="314B5D"/>
+                </a:solidFill>
+                <a:latin typeface="Malgun Gothic"/>
+                <a:ea typeface="Malgun Gothic"/>
+                <a:cs typeface="Malgun Gothic"/>
+              </a:rPr>
+              <a:t>발생</a:t>
+            </a:r>
+            <a:r>
+              <a:rPr sz="1725" b="0" dirty="0">
+                <a:solidFill>
+                  <a:srgbClr val="314B5D"/>
+                </a:solidFill>
+                <a:latin typeface="Malgun Gothic"/>
+                <a:ea typeface="Malgun Gothic"/>
+                <a:cs typeface="Malgun Gothic"/>
+              </a:rPr>
+              <a:t> </a:t>
+            </a:r>
+            <a:r>
+              <a:rPr sz="1725" b="0" dirty="0" err="1">
+                <a:solidFill>
+                  <a:srgbClr val="314B5D"/>
+                </a:solidFill>
+                <a:latin typeface="Malgun Gothic"/>
+                <a:ea typeface="Malgun Gothic"/>
+                <a:cs typeface="Malgun Gothic"/>
+              </a:rPr>
+              <a:t>여부와</a:t>
+            </a:r>
+            <a:r>
+              <a:rPr sz="1725" b="0" dirty="0">
+                <a:solidFill>
+                  <a:srgbClr val="314B5D"/>
+                </a:solidFill>
+                <a:latin typeface="Malgun Gothic"/>
+                <a:ea typeface="Malgun Gothic"/>
+                <a:cs typeface="Malgun Gothic"/>
+              </a:rPr>
+              <a:t> </a:t>
+            </a:r>
+            <a:r>
+              <a:rPr sz="1725" b="0" dirty="0" err="1">
+                <a:solidFill>
+                  <a:srgbClr val="314B5D"/>
+                </a:solidFill>
+                <a:latin typeface="Malgun Gothic"/>
+                <a:ea typeface="Malgun Gothic"/>
+                <a:cs typeface="Malgun Gothic"/>
+              </a:rPr>
+              <a:t>영향</a:t>
+            </a:r>
+            <a:r>
+              <a:rPr sz="1725" b="0" dirty="0">
+                <a:solidFill>
+                  <a:srgbClr val="314B5D"/>
+                </a:solidFill>
+                <a:latin typeface="Malgun Gothic"/>
+                <a:ea typeface="Malgun Gothic"/>
+                <a:cs typeface="Malgun Gothic"/>
+              </a:rPr>
+              <a:t> </a:t>
+            </a:r>
+            <a:r>
+              <a:rPr sz="1725" b="0" dirty="0" err="1">
+                <a:solidFill>
+                  <a:srgbClr val="314B5D"/>
+                </a:solidFill>
+                <a:latin typeface="Malgun Gothic"/>
+                <a:ea typeface="Malgun Gothic"/>
+                <a:cs typeface="Malgun Gothic"/>
+              </a:rPr>
+              <a:t>범위를</a:t>
+            </a:r>
+            <a:r>
+              <a:rPr sz="1725" b="0" dirty="0">
+                <a:solidFill>
+                  <a:srgbClr val="314B5D"/>
+                </a:solidFill>
+                <a:latin typeface="Malgun Gothic"/>
+                <a:ea typeface="Malgun Gothic"/>
+                <a:cs typeface="Malgun Gothic"/>
+              </a:rPr>
+              <a:t> </a:t>
+            </a:r>
+            <a:r>
+              <a:rPr sz="1725" b="0" dirty="0" err="1">
+                <a:solidFill>
+                  <a:srgbClr val="314B5D"/>
+                </a:solidFill>
+                <a:latin typeface="Malgun Gothic"/>
+                <a:ea typeface="Malgun Gothic"/>
+                <a:cs typeface="Malgun Gothic"/>
+              </a:rPr>
+              <a:t>구분합니다</a:t>
+            </a:r>
+            <a:r>
+              <a:rPr sz="1725" b="0" dirty="0">
+                <a:solidFill>
+                  <a:srgbClr val="314B5D"/>
+                </a:solidFill>
+                <a:latin typeface="Malgun Gothic"/>
+                <a:ea typeface="Malgun Gothic"/>
+                <a:cs typeface="Malgun Gothic"/>
+              </a:rPr>
+              <a:t>.</a:t>
             </a:r>
           </a:p>
         </p:txBody>
@@ -7927,11 +8394,17 @@
             </a:extLst>
           </p:cNvPr>
           <p:cNvGraphicFramePr/>
-          <p:nvPr/>
+          <p:nvPr>
+            <p:extLst>
+              <p:ext uri="{D42A27DB-BD31-4B8C-83A1-F6EECF244321}">
+                <p14:modId xmlns:p14="http://schemas.microsoft.com/office/powerpoint/2010/main" val="4277413281"/>
+              </p:ext>
+            </p:extLst>
+          </p:nvPr>
         </p:nvGraphicFramePr>
         <p:xfrm>
           <a:off x="476250" y="3857625"/>
-          <a:ext cx="11239500" cy="2162175"/>
+          <a:ext cx="11239500" cy="2162176"/>
         </p:xfrm>
         <a:graphic>
           <a:graphicData uri="http://schemas.openxmlformats.org/drawingml/2006/table">
@@ -8214,7 +8687,7 @@
                     <a:lstStyle/>
                     <a:p>
                       <a:r>
-                        <a:rPr sz="1500" b="0">
+                        <a:rPr sz="1500" b="0" dirty="0" err="1">
                           <a:solidFill>
                             <a:srgbClr val="314B5D"/>
                           </a:solidFill>
@@ -8222,8 +8695,159 @@
                           <a:ea typeface="Malgun Gothic"/>
                           <a:cs typeface="Malgun Gothic"/>
                         </a:rPr>
-                        <a:t>화물 흔들림, 목표 위치 오차, 작업 중단·대기 증가가 발생하는지 확인</a:t>
+                        <a:t>화물</a:t>
                       </a:r>
+                      <a:r>
+                        <a:rPr sz="1500" b="0" dirty="0">
+                          <a:solidFill>
+                            <a:srgbClr val="314B5D"/>
+                          </a:solidFill>
+                          <a:latin typeface="Malgun Gothic"/>
+                          <a:ea typeface="Malgun Gothic"/>
+                          <a:cs typeface="Malgun Gothic"/>
+                        </a:rPr>
+                        <a:t> </a:t>
+                      </a:r>
+                      <a:r>
+                        <a:rPr sz="1500" b="0" dirty="0" err="1">
+                          <a:solidFill>
+                            <a:srgbClr val="314B5D"/>
+                          </a:solidFill>
+                          <a:latin typeface="Malgun Gothic"/>
+                          <a:ea typeface="Malgun Gothic"/>
+                          <a:cs typeface="Malgun Gothic"/>
+                        </a:rPr>
+                        <a:t>흔들림</a:t>
+                      </a:r>
+                      <a:r>
+                        <a:rPr sz="1500" b="0" dirty="0">
+                          <a:solidFill>
+                            <a:srgbClr val="314B5D"/>
+                          </a:solidFill>
+                          <a:latin typeface="Malgun Gothic"/>
+                          <a:ea typeface="Malgun Gothic"/>
+                          <a:cs typeface="Malgun Gothic"/>
+                        </a:rPr>
+                        <a:t>, </a:t>
+                      </a:r>
+                      <a:r>
+                        <a:rPr sz="1500" b="0" dirty="0" err="1">
+                          <a:solidFill>
+                            <a:srgbClr val="314B5D"/>
+                          </a:solidFill>
+                          <a:latin typeface="Malgun Gothic"/>
+                          <a:ea typeface="Malgun Gothic"/>
+                          <a:cs typeface="Malgun Gothic"/>
+                        </a:rPr>
+                        <a:t>목표</a:t>
+                      </a:r>
+                      <a:r>
+                        <a:rPr sz="1500" b="0" dirty="0">
+                          <a:solidFill>
+                            <a:srgbClr val="314B5D"/>
+                          </a:solidFill>
+                          <a:latin typeface="Malgun Gothic"/>
+                          <a:ea typeface="Malgun Gothic"/>
+                          <a:cs typeface="Malgun Gothic"/>
+                        </a:rPr>
+                        <a:t> </a:t>
+                      </a:r>
+                      <a:r>
+                        <a:rPr sz="1500" b="0" dirty="0" err="1">
+                          <a:solidFill>
+                            <a:srgbClr val="314B5D"/>
+                          </a:solidFill>
+                          <a:latin typeface="Malgun Gothic"/>
+                          <a:ea typeface="Malgun Gothic"/>
+                          <a:cs typeface="Malgun Gothic"/>
+                        </a:rPr>
+                        <a:t>위치</a:t>
+                      </a:r>
+                      <a:r>
+                        <a:rPr sz="1500" b="0" dirty="0">
+                          <a:solidFill>
+                            <a:srgbClr val="314B5D"/>
+                          </a:solidFill>
+                          <a:latin typeface="Malgun Gothic"/>
+                          <a:ea typeface="Malgun Gothic"/>
+                          <a:cs typeface="Malgun Gothic"/>
+                        </a:rPr>
+                        <a:t> </a:t>
+                      </a:r>
+                      <a:r>
+                        <a:rPr sz="1500" b="0" dirty="0" err="1">
+                          <a:solidFill>
+                            <a:srgbClr val="314B5D"/>
+                          </a:solidFill>
+                          <a:latin typeface="Malgun Gothic"/>
+                          <a:ea typeface="Malgun Gothic"/>
+                          <a:cs typeface="Malgun Gothic"/>
+                        </a:rPr>
+                        <a:t>오차</a:t>
+                      </a:r>
+                      <a:r>
+                        <a:rPr lang="ko-KR" altLang="en-US" sz="1500" b="0" dirty="0">
+                          <a:solidFill>
+                            <a:srgbClr val="314B5D"/>
+                          </a:solidFill>
+                          <a:latin typeface="Malgun Gothic"/>
+                          <a:ea typeface="Malgun Gothic"/>
+                          <a:cs typeface="Malgun Gothic"/>
+                        </a:rPr>
+                        <a:t>로 인한 </a:t>
+                      </a:r>
+                      <a:r>
+                        <a:rPr sz="1500" b="0" dirty="0" err="1">
+                          <a:solidFill>
+                            <a:srgbClr val="314B5D"/>
+                          </a:solidFill>
+                          <a:latin typeface="Malgun Gothic"/>
+                          <a:ea typeface="Malgun Gothic"/>
+                          <a:cs typeface="Malgun Gothic"/>
+                        </a:rPr>
+                        <a:t>작업</a:t>
+                      </a:r>
+                      <a:r>
+                        <a:rPr sz="1500" b="0" dirty="0">
+                          <a:solidFill>
+                            <a:srgbClr val="314B5D"/>
+                          </a:solidFill>
+                          <a:latin typeface="Malgun Gothic"/>
+                          <a:ea typeface="Malgun Gothic"/>
+                          <a:cs typeface="Malgun Gothic"/>
+                        </a:rPr>
+                        <a:t> </a:t>
+                      </a:r>
+                      <a:r>
+                        <a:rPr sz="1500" b="0" dirty="0" err="1">
+                          <a:solidFill>
+                            <a:srgbClr val="314B5D"/>
+                          </a:solidFill>
+                          <a:latin typeface="Malgun Gothic"/>
+                          <a:ea typeface="Malgun Gothic"/>
+                          <a:cs typeface="Malgun Gothic"/>
+                        </a:rPr>
+                        <a:t>대기</a:t>
+                      </a:r>
+                      <a:r>
+                        <a:rPr lang="ko-KR" altLang="en-US" sz="1500" b="0" dirty="0">
+                          <a:solidFill>
+                            <a:srgbClr val="314B5D"/>
+                          </a:solidFill>
+                          <a:latin typeface="Malgun Gothic"/>
+                          <a:ea typeface="Malgun Gothic"/>
+                          <a:cs typeface="Malgun Gothic"/>
+                        </a:rPr>
+                        <a:t>시간이 발생</a:t>
+                      </a:r>
+                      <a:endParaRPr sz="1500" b="0" dirty="0">
+                        <a:solidFill>
+                          <a:srgbClr val="314B5D"/>
+                        </a:solidFill>
+                        <a:latin typeface="Malgun Gothic"/>
+                        <a:ea typeface="Malgun Gothic"/>
+                        <a:cs typeface="Malgun Gothic"/>
+                      </a:endParaRPr>
                     </a:p>
                   </a:txBody>
                   <a:tcPr>
@@ -8321,7 +8945,7 @@
                     <a:lstStyle/>
                     <a:p>
                       <a:r>
-                        <a:rPr sz="1500" b="0">
+                        <a:rPr sz="1500" b="0" dirty="0" err="1">
                           <a:solidFill>
                             <a:srgbClr val="314B5D"/>
                           </a:solidFill>
@@ -8329,8 +8953,170 @@
                           <a:ea typeface="Malgun Gothic"/>
                           <a:cs typeface="Malgun Gothic"/>
                         </a:rPr>
-                        <a:t>위험 조건에서는 작업을 보류하고, 안정화 후 위치·체결 상태를 재확인</a:t>
+                        <a:t>위험</a:t>
                       </a:r>
+                      <a:r>
+                        <a:rPr sz="1500" b="0" dirty="0">
+                          <a:solidFill>
+                            <a:srgbClr val="314B5D"/>
+                          </a:solidFill>
+                          <a:latin typeface="Malgun Gothic"/>
+                          <a:ea typeface="Malgun Gothic"/>
+                          <a:cs typeface="Malgun Gothic"/>
+                        </a:rPr>
+                        <a:t> </a:t>
+                      </a:r>
+                      <a:r>
+                        <a:rPr sz="1500" b="0" dirty="0" err="1">
+                          <a:solidFill>
+                            <a:srgbClr val="314B5D"/>
+                          </a:solidFill>
+                          <a:latin typeface="Malgun Gothic"/>
+                          <a:ea typeface="Malgun Gothic"/>
+                          <a:cs typeface="Malgun Gothic"/>
+                        </a:rPr>
+                        <a:t>조건에서는</a:t>
+                      </a:r>
+                      <a:r>
+                        <a:rPr sz="1500" b="0" dirty="0">
+                          <a:solidFill>
+                            <a:srgbClr val="314B5D"/>
+                          </a:solidFill>
+                          <a:latin typeface="Malgun Gothic"/>
+                          <a:ea typeface="Malgun Gothic"/>
+                          <a:cs typeface="Malgun Gothic"/>
+                        </a:rPr>
+                        <a:t> </a:t>
+                      </a:r>
+                      <a:r>
+                        <a:rPr sz="1500" b="0" dirty="0" err="1">
+                          <a:solidFill>
+                            <a:srgbClr val="314B5D"/>
+                          </a:solidFill>
+                          <a:latin typeface="Malgun Gothic"/>
+                          <a:ea typeface="Malgun Gothic"/>
+                          <a:cs typeface="Malgun Gothic"/>
+                        </a:rPr>
+                        <a:t>작업을</a:t>
+                      </a:r>
+                      <a:r>
+                        <a:rPr sz="1500" b="0" dirty="0">
+                          <a:solidFill>
+                            <a:srgbClr val="314B5D"/>
+                          </a:solidFill>
+                          <a:latin typeface="Malgun Gothic"/>
+                          <a:ea typeface="Malgun Gothic"/>
+                          <a:cs typeface="Malgun Gothic"/>
+                        </a:rPr>
+                        <a:t> </a:t>
+                      </a:r>
+                      <a:r>
+                        <a:rPr sz="1500" b="0" dirty="0" err="1">
+                          <a:solidFill>
+                            <a:srgbClr val="314B5D"/>
+                          </a:solidFill>
+                          <a:latin typeface="Malgun Gothic"/>
+                          <a:ea typeface="Malgun Gothic"/>
+                          <a:cs typeface="Malgun Gothic"/>
+                        </a:rPr>
+                        <a:t>보류하고</a:t>
+                      </a:r>
+                      <a:r>
+                        <a:rPr sz="1500" b="0" dirty="0">
+                          <a:solidFill>
+                            <a:srgbClr val="314B5D"/>
+                          </a:solidFill>
+                          <a:latin typeface="Malgun Gothic"/>
+                          <a:ea typeface="Malgun Gothic"/>
+                          <a:cs typeface="Malgun Gothic"/>
+                        </a:rPr>
+                        <a:t>, </a:t>
+                      </a:r>
+                      <a:r>
+                        <a:rPr sz="1500" b="0" dirty="0" err="1">
+                          <a:solidFill>
+                            <a:srgbClr val="314B5D"/>
+                          </a:solidFill>
+                          <a:latin typeface="Malgun Gothic"/>
+                          <a:ea typeface="Malgun Gothic"/>
+                          <a:cs typeface="Malgun Gothic"/>
+                        </a:rPr>
+                        <a:t>안정화</a:t>
+                      </a:r>
+                      <a:r>
+                        <a:rPr sz="1500" b="0" dirty="0">
+                          <a:solidFill>
+                            <a:srgbClr val="314B5D"/>
+                          </a:solidFill>
+                          <a:latin typeface="Malgun Gothic"/>
+                          <a:ea typeface="Malgun Gothic"/>
+                          <a:cs typeface="Malgun Gothic"/>
+                        </a:rPr>
+                        <a:t> 후 </a:t>
+                      </a:r>
+                      <a:r>
+                        <a:rPr sz="1500" b="0" dirty="0" err="1">
+                          <a:solidFill>
+                            <a:srgbClr val="314B5D"/>
+                          </a:solidFill>
+                          <a:latin typeface="Malgun Gothic"/>
+                          <a:ea typeface="Malgun Gothic"/>
+                          <a:cs typeface="Malgun Gothic"/>
+                        </a:rPr>
+                        <a:t>위치·체결</a:t>
+                      </a:r>
+                      <a:r>
+                        <a:rPr sz="1500" b="0" dirty="0">
+                          <a:solidFill>
+                            <a:srgbClr val="314B5D"/>
+                          </a:solidFill>
+                          <a:latin typeface="Malgun Gothic"/>
+                          <a:ea typeface="Malgun Gothic"/>
+                          <a:cs typeface="Malgun Gothic"/>
+                        </a:rPr>
+                        <a:t> </a:t>
+                      </a:r>
+                      <a:r>
+                        <a:rPr sz="1500" b="0" dirty="0" err="1">
+                          <a:solidFill>
+                            <a:srgbClr val="314B5D"/>
+                          </a:solidFill>
+                          <a:latin typeface="Malgun Gothic"/>
+                          <a:ea typeface="Malgun Gothic"/>
+                          <a:cs typeface="Malgun Gothic"/>
+                        </a:rPr>
+                        <a:t>상태를</a:t>
+                      </a:r>
+                      <a:r>
+                        <a:rPr sz="1500" b="0" dirty="0">
+                          <a:solidFill>
+                            <a:srgbClr val="314B5D"/>
+                          </a:solidFill>
+                          <a:latin typeface="Malgun Gothic"/>
+                          <a:ea typeface="Malgun Gothic"/>
+                          <a:cs typeface="Malgun Gothic"/>
+                        </a:rPr>
+                        <a:t> </a:t>
+                      </a:r>
+                      <a:r>
+                        <a:rPr sz="1500" b="0" dirty="0" err="1">
+                          <a:solidFill>
+                            <a:srgbClr val="314B5D"/>
+                          </a:solidFill>
+                          <a:latin typeface="Malgun Gothic"/>
+                          <a:ea typeface="Malgun Gothic"/>
+                          <a:cs typeface="Malgun Gothic"/>
+                        </a:rPr>
+                        <a:t>재확인</a:t>
+                      </a:r>
+                      <a:endParaRPr sz="1500" b="0" dirty="0">
+                        <a:solidFill>
+                          <a:srgbClr val="314B5D"/>
+                        </a:solidFill>
+                        <a:latin typeface="Malgun Gothic"/>
+                        <a:ea typeface="Malgun Gothic"/>
+                        <a:cs typeface="Malgun Gothic"/>
+                      </a:endParaRPr>
                     </a:p>
                   </a:txBody>
                   <a:tcPr>
@@ -8444,6 +9230,13 @@
             <a:noFill/>
           </a:ln>
         </p:spPr>
+        <p:txBody>
+          <a:bodyPr/>
+          <a:lstStyle/>
+          <a:p>
+            <a:endParaRPr lang="ko-KR" altLang="en-US"/>
+          </a:p>
+        </p:txBody>
       </p:sp>
       <p:sp>
         <p:nvSpPr>
@@ -8672,6 +9465,13 @@
             <a:noFill/>
           </a:ln>
         </p:spPr>
+        <p:txBody>
+          <a:bodyPr/>
+          <a:lstStyle/>
+          <a:p>
+            <a:endParaRPr lang="ko-KR" altLang="en-US"/>
+          </a:p>
+        </p:txBody>
       </p:sp>
       <p:sp>
         <p:nvSpPr>
@@ -9221,7 +10021,7 @@
         </p:nvGraphicFramePr>
         <p:xfrm>
           <a:off x="476250" y="3848100"/>
-          <a:ext cx="11239500" cy="2219325"/>
+          <a:ext cx="11239500" cy="2219324"/>
         </p:xfrm>
         <a:graphic>
           <a:graphicData uri="http://schemas.openxmlformats.org/drawingml/2006/table">
@@ -9734,6 +10534,13 @@
             <a:noFill/>
           </a:ln>
         </p:spPr>
+        <p:txBody>
+          <a:bodyPr/>
+          <a:lstStyle/>
+          <a:p>
+            <a:endParaRPr lang="ko-KR" altLang="en-US"/>
+          </a:p>
+        </p:txBody>
       </p:sp>
       <p:sp>
         <p:nvSpPr>
@@ -9962,6 +10769,13 @@
             <a:noFill/>
           </a:ln>
         </p:spPr>
+        <p:txBody>
+          <a:bodyPr/>
+          <a:lstStyle/>
+          <a:p>
+            <a:endParaRPr lang="ko-KR" altLang="en-US"/>
+          </a:p>
+        </p:txBody>
       </p:sp>
       <p:sp>
         <p:nvSpPr>
@@ -10511,7 +11325,7 @@
         </p:nvGraphicFramePr>
         <p:xfrm>
           <a:off x="476250" y="3886200"/>
-          <a:ext cx="11239500" cy="2152650"/>
+          <a:ext cx="11239500" cy="2152652"/>
         </p:xfrm>
         <a:graphic>
           <a:graphicData uri="http://schemas.openxmlformats.org/drawingml/2006/table">
@@ -11024,6 +11838,13 @@
             <a:noFill/>
           </a:ln>
         </p:spPr>
+        <p:txBody>
+          <a:bodyPr/>
+          <a:lstStyle/>
+          <a:p>
+            <a:endParaRPr lang="ko-KR" altLang="en-US"/>
+          </a:p>
+        </p:txBody>
       </p:sp>
       <p:sp>
         <p:nvSpPr>
@@ -11252,6 +12073,13 @@
             <a:noFill/>
           </a:ln>
         </p:spPr>
+        <p:txBody>
+          <a:bodyPr/>
+          <a:lstStyle/>
+          <a:p>
+            <a:endParaRPr lang="ko-KR" altLang="en-US"/>
+          </a:p>
+        </p:txBody>
       </p:sp>
       <p:sp>
         <p:nvSpPr>
@@ -11801,7 +12629,7 @@
         </p:nvGraphicFramePr>
         <p:xfrm>
           <a:off x="476250" y="3886200"/>
-          <a:ext cx="11239500" cy="2152650"/>
+          <a:ext cx="11239500" cy="2152652"/>
         </p:xfrm>
         <a:graphic>
           <a:graphicData uri="http://schemas.openxmlformats.org/drawingml/2006/table">
@@ -12314,6 +13142,13 @@
             <a:noFill/>
           </a:ln>
         </p:spPr>
+        <p:txBody>
+          <a:bodyPr/>
+          <a:lstStyle/>
+          <a:p>
+            <a:endParaRPr lang="ko-KR" altLang="en-US"/>
+          </a:p>
+        </p:txBody>
       </p:sp>
       <p:sp>
         <p:nvSpPr>
@@ -12542,6 +13377,13 @@
             <a:noFill/>
           </a:ln>
         </p:spPr>
+        <p:txBody>
+          <a:bodyPr/>
+          <a:lstStyle/>
+          <a:p>
+            <a:endParaRPr lang="ko-KR" altLang="en-US"/>
+          </a:p>
+        </p:txBody>
       </p:sp>
       <p:sp>
         <p:nvSpPr>
@@ -13091,7 +13933,7 @@
         </p:nvGraphicFramePr>
         <p:xfrm>
           <a:off x="476250" y="3886200"/>
-          <a:ext cx="11239500" cy="2152650"/>
+          <a:ext cx="11239500" cy="2152652"/>
         </p:xfrm>
         <a:graphic>
           <a:graphicData uri="http://schemas.openxmlformats.org/drawingml/2006/table">
@@ -13604,6 +14446,13 @@
             <a:noFill/>
           </a:ln>
         </p:spPr>
+        <p:txBody>
+          <a:bodyPr/>
+          <a:lstStyle/>
+          <a:p>
+            <a:endParaRPr lang="ko-KR" altLang="en-US"/>
+          </a:p>
+        </p:txBody>
       </p:sp>
       <p:sp>
         <p:nvSpPr>
@@ -13832,6 +14681,13 @@
             <a:noFill/>
           </a:ln>
         </p:spPr>
+        <p:txBody>
+          <a:bodyPr/>
+          <a:lstStyle/>
+          <a:p>
+            <a:endParaRPr lang="ko-KR" altLang="en-US"/>
+          </a:p>
+        </p:txBody>
       </p:sp>
       <p:sp>
         <p:nvSpPr>
